--- a/개발환경 운영지원 평가/git작업(조원 박형규).pptx
+++ b/개발환경 운영지원 평가/git작업(조원 박형규).pptx
@@ -111,6 +111,11 @@
       </a:defRPr>
     </a:lvl9pPr>
   </p:defaultTextStyle>
+  <p:extLst>
+    <p:ext uri="{EFAFB233-063F-42B5-8137-9DF3F51BA10A}">
+      <p15:sldGuideLst xmlns:p15="http://schemas.microsoft.com/office/powerpoint/2012/main"/>
+    </p:ext>
+  </p:extLst>
 </p:presentation>
 </file>
 
@@ -261,7 +266,7 @@
           <a:p>
             <a:fld id="{7B250858-8BB8-49A6-9F65-EA75EE375C34}" type="datetimeFigureOut">
               <a:rPr lang="ko-KR" altLang="en-US" smtClean="0"/>
-              <a:t>2026-04-22</a:t>
+              <a:t>2026-04-27</a:t>
             </a:fld>
             <a:endParaRPr lang="ko-KR" altLang="en-US"/>
           </a:p>
@@ -459,7 +464,7 @@
           <a:p>
             <a:fld id="{7B250858-8BB8-49A6-9F65-EA75EE375C34}" type="datetimeFigureOut">
               <a:rPr lang="ko-KR" altLang="en-US" smtClean="0"/>
-              <a:t>2026-04-22</a:t>
+              <a:t>2026-04-27</a:t>
             </a:fld>
             <a:endParaRPr lang="ko-KR" altLang="en-US"/>
           </a:p>
@@ -667,7 +672,7 @@
           <a:p>
             <a:fld id="{7B250858-8BB8-49A6-9F65-EA75EE375C34}" type="datetimeFigureOut">
               <a:rPr lang="ko-KR" altLang="en-US" smtClean="0"/>
-              <a:t>2026-04-22</a:t>
+              <a:t>2026-04-27</a:t>
             </a:fld>
             <a:endParaRPr lang="ko-KR" altLang="en-US"/>
           </a:p>
@@ -865,7 +870,7 @@
           <a:p>
             <a:fld id="{7B250858-8BB8-49A6-9F65-EA75EE375C34}" type="datetimeFigureOut">
               <a:rPr lang="ko-KR" altLang="en-US" smtClean="0"/>
-              <a:t>2026-04-22</a:t>
+              <a:t>2026-04-27</a:t>
             </a:fld>
             <a:endParaRPr lang="ko-KR" altLang="en-US"/>
           </a:p>
@@ -1140,7 +1145,7 @@
           <a:p>
             <a:fld id="{7B250858-8BB8-49A6-9F65-EA75EE375C34}" type="datetimeFigureOut">
               <a:rPr lang="ko-KR" altLang="en-US" smtClean="0"/>
-              <a:t>2026-04-22</a:t>
+              <a:t>2026-04-27</a:t>
             </a:fld>
             <a:endParaRPr lang="ko-KR" altLang="en-US"/>
           </a:p>
@@ -1405,7 +1410,7 @@
           <a:p>
             <a:fld id="{7B250858-8BB8-49A6-9F65-EA75EE375C34}" type="datetimeFigureOut">
               <a:rPr lang="ko-KR" altLang="en-US" smtClean="0"/>
-              <a:t>2026-04-22</a:t>
+              <a:t>2026-04-27</a:t>
             </a:fld>
             <a:endParaRPr lang="ko-KR" altLang="en-US"/>
           </a:p>
@@ -1817,7 +1822,7 @@
           <a:p>
             <a:fld id="{7B250858-8BB8-49A6-9F65-EA75EE375C34}" type="datetimeFigureOut">
               <a:rPr lang="ko-KR" altLang="en-US" smtClean="0"/>
-              <a:t>2026-04-22</a:t>
+              <a:t>2026-04-27</a:t>
             </a:fld>
             <a:endParaRPr lang="ko-KR" altLang="en-US"/>
           </a:p>
@@ -1958,7 +1963,7 @@
           <a:p>
             <a:fld id="{7B250858-8BB8-49A6-9F65-EA75EE375C34}" type="datetimeFigureOut">
               <a:rPr lang="ko-KR" altLang="en-US" smtClean="0"/>
-              <a:t>2026-04-22</a:t>
+              <a:t>2026-04-27</a:t>
             </a:fld>
             <a:endParaRPr lang="ko-KR" altLang="en-US"/>
           </a:p>
@@ -2071,7 +2076,7 @@
           <a:p>
             <a:fld id="{7B250858-8BB8-49A6-9F65-EA75EE375C34}" type="datetimeFigureOut">
               <a:rPr lang="ko-KR" altLang="en-US" smtClean="0"/>
-              <a:t>2026-04-22</a:t>
+              <a:t>2026-04-27</a:t>
             </a:fld>
             <a:endParaRPr lang="ko-KR" altLang="en-US"/>
           </a:p>
@@ -2382,7 +2387,7 @@
           <a:p>
             <a:fld id="{7B250858-8BB8-49A6-9F65-EA75EE375C34}" type="datetimeFigureOut">
               <a:rPr lang="ko-KR" altLang="en-US" smtClean="0"/>
-              <a:t>2026-04-22</a:t>
+              <a:t>2026-04-27</a:t>
             </a:fld>
             <a:endParaRPr lang="ko-KR" altLang="en-US"/>
           </a:p>
@@ -2670,7 +2675,7 @@
           <a:p>
             <a:fld id="{7B250858-8BB8-49A6-9F65-EA75EE375C34}" type="datetimeFigureOut">
               <a:rPr lang="ko-KR" altLang="en-US" smtClean="0"/>
-              <a:t>2026-04-22</a:t>
+              <a:t>2026-04-27</a:t>
             </a:fld>
             <a:endParaRPr lang="ko-KR" altLang="en-US"/>
           </a:p>
@@ -2911,7 +2916,7 @@
           <a:p>
             <a:fld id="{7B250858-8BB8-49A6-9F65-EA75EE375C34}" type="datetimeFigureOut">
               <a:rPr lang="ko-KR" altLang="en-US" smtClean="0"/>
-              <a:t>2026-04-22</a:t>
+              <a:t>2026-04-27</a:t>
             </a:fld>
             <a:endParaRPr lang="ko-KR" altLang="en-US"/>
           </a:p>
@@ -3388,6 +3393,53 @@
           </a:prstGeom>
         </p:spPr>
       </p:pic>
+      <p:sp>
+        <p:nvSpPr>
+          <p:cNvPr id="2" name="TextBox 1">
+            <a:extLst>
+              <a:ext uri="{FF2B5EF4-FFF2-40B4-BE49-F238E27FC236}">
+                <a16:creationId xmlns:a16="http://schemas.microsoft.com/office/drawing/2014/main" id="{BF8E18FA-FFBE-4FE0-B543-BED276A77048}"/>
+              </a:ext>
+            </a:extLst>
+          </p:cNvPr>
+          <p:cNvSpPr txBox="1"/>
+          <p:nvPr/>
+        </p:nvSpPr>
+        <p:spPr>
+          <a:xfrm>
+            <a:off x="3791824" y="4613945"/>
+            <a:ext cx="4291496" cy="369332"/>
+          </a:xfrm>
+          <a:prstGeom prst="rect">
+            <a:avLst/>
+          </a:prstGeom>
+          <a:noFill/>
+        </p:spPr>
+        <p:txBody>
+          <a:bodyPr wrap="none" rtlCol="0">
+            <a:spAutoFit/>
+          </a:bodyPr>
+          <a:lstStyle/>
+          <a:p>
+            <a:r>
+              <a:rPr lang="en-US" altLang="ko-KR" dirty="0"/>
+              <a:t>Issue </a:t>
+            </a:r>
+            <a:r>
+              <a:rPr lang="ko-KR" altLang="en-US" dirty="0"/>
+              <a:t>만들고 </a:t>
+            </a:r>
+            <a:r>
+              <a:rPr lang="en-US" altLang="ko-KR" dirty="0"/>
+              <a:t>project</a:t>
+            </a:r>
+            <a:r>
+              <a:rPr lang="ko-KR" altLang="en-US" dirty="0"/>
+              <a:t>에 올라갔는지 확인</a:t>
+            </a:r>
+          </a:p>
+        </p:txBody>
+      </p:sp>
     </p:spTree>
     <p:extLst>
       <p:ext uri="{BB962C8B-B14F-4D97-AF65-F5344CB8AC3E}">
@@ -3440,7 +3492,7 @@
         </p:blipFill>
         <p:spPr>
           <a:xfrm>
-            <a:off x="251460" y="1485900"/>
+            <a:off x="184348" y="1133562"/>
             <a:ext cx="5066143" cy="3032487"/>
           </a:xfrm>
           <a:prstGeom prst="rect">
@@ -3470,7 +3522,7 @@
         </p:blipFill>
         <p:spPr>
           <a:xfrm>
-            <a:off x="6678464" y="1675822"/>
+            <a:off x="6342902" y="3746372"/>
             <a:ext cx="4660035" cy="2454522"/>
           </a:xfrm>
           <a:prstGeom prst="rect">
@@ -3553,9 +3605,80 @@
           <p:nvPr/>
         </p:nvCxnSpPr>
         <p:spPr>
-          <a:xfrm>
-            <a:off x="5638800" y="3002143"/>
-            <a:ext cx="815340" cy="0"/>
+          <a:xfrm flipV="1">
+            <a:off x="5638800" y="2382473"/>
+            <a:ext cx="996892" cy="619670"/>
+          </a:xfrm>
+          <a:prstGeom prst="straightConnector1">
+            <a:avLst/>
+          </a:prstGeom>
+          <a:ln>
+            <a:tailEnd type="triangle"/>
+          </a:ln>
+        </p:spPr>
+        <p:style>
+          <a:lnRef idx="1">
+            <a:schemeClr val="accent1"/>
+          </a:lnRef>
+          <a:fillRef idx="0">
+            <a:schemeClr val="accent1"/>
+          </a:fillRef>
+          <a:effectRef idx="0">
+            <a:schemeClr val="accent1"/>
+          </a:effectRef>
+          <a:fontRef idx="minor">
+            <a:schemeClr val="tx1"/>
+          </a:fontRef>
+        </p:style>
+      </p:cxnSp>
+      <p:pic>
+        <p:nvPicPr>
+          <p:cNvPr id="3" name="그림 2">
+            <a:extLst>
+              <a:ext uri="{FF2B5EF4-FFF2-40B4-BE49-F238E27FC236}">
+                <a16:creationId xmlns:a16="http://schemas.microsoft.com/office/drawing/2014/main" id="{65FF07A7-8A56-4123-8CD5-BE537F845970}"/>
+              </a:ext>
+            </a:extLst>
+          </p:cNvPr>
+          <p:cNvPicPr>
+            <a:picLocks noChangeAspect="1"/>
+          </p:cNvPicPr>
+          <p:nvPr/>
+        </p:nvPicPr>
+        <p:blipFill>
+          <a:blip r:embed="rId4"/>
+          <a:stretch>
+            <a:fillRect/>
+          </a:stretch>
+        </p:blipFill>
+        <p:spPr>
+          <a:xfrm>
+            <a:off x="7062884" y="657106"/>
+            <a:ext cx="3220073" cy="2093047"/>
+          </a:xfrm>
+          <a:prstGeom prst="rect">
+            <a:avLst/>
+          </a:prstGeom>
+        </p:spPr>
+      </p:pic>
+      <p:cxnSp>
+        <p:nvCxnSpPr>
+          <p:cNvPr id="10" name="직선 화살표 연결선 9">
+            <a:extLst>
+              <a:ext uri="{FF2B5EF4-FFF2-40B4-BE49-F238E27FC236}">
+                <a16:creationId xmlns:a16="http://schemas.microsoft.com/office/drawing/2014/main" id="{7FDD5FC9-611C-49A6-8A12-D944CB2FDFED}"/>
+              </a:ext>
+            </a:extLst>
+          </p:cNvPr>
+          <p:cNvCxnSpPr>
+            <a:cxnSpLocks/>
+          </p:cNvCxnSpPr>
+          <p:nvPr/>
+        </p:nvCxnSpPr>
+        <p:spPr>
+          <a:xfrm>
+            <a:off x="8523215" y="2885813"/>
+            <a:ext cx="0" cy="608569"/>
           </a:xfrm>
           <a:prstGeom prst="straightConnector1">
             <a:avLst/>
@@ -3986,7 +4109,7 @@
         <p:spPr>
           <a:xfrm>
             <a:off x="1981200" y="209054"/>
-            <a:ext cx="728084" cy="369332"/>
+            <a:ext cx="854721" cy="369332"/>
           </a:xfrm>
           <a:prstGeom prst="rect">
             <a:avLst/>
@@ -4002,6 +4125,10 @@
             <a:r>
               <a:rPr lang="ko-KR" altLang="en-US" dirty="0" err="1"/>
               <a:t>할일</a:t>
+            </a:r>
+            <a:r>
+              <a:rPr lang="en-US" altLang="ko-KR" dirty="0"/>
+              <a:t>1</a:t>
             </a:r>
             <a:r>
               <a:rPr lang="ko-KR" altLang="en-US" dirty="0"/>
@@ -4253,6 +4380,79 @@
           </a:prstGeom>
         </p:spPr>
       </p:pic>
+      <p:sp>
+        <p:nvSpPr>
+          <p:cNvPr id="6" name="TextBox 5">
+            <a:extLst>
+              <a:ext uri="{FF2B5EF4-FFF2-40B4-BE49-F238E27FC236}">
+                <a16:creationId xmlns:a16="http://schemas.microsoft.com/office/drawing/2014/main" id="{B24DFA80-B30B-43E9-9307-A611277E6B8A}"/>
+              </a:ext>
+            </a:extLst>
+          </p:cNvPr>
+          <p:cNvSpPr txBox="1"/>
+          <p:nvPr/>
+        </p:nvSpPr>
+        <p:spPr>
+          <a:xfrm>
+            <a:off x="3810000" y="2738719"/>
+            <a:ext cx="854721" cy="369332"/>
+          </a:xfrm>
+          <a:prstGeom prst="rect">
+            <a:avLst/>
+          </a:prstGeom>
+          <a:noFill/>
+        </p:spPr>
+        <p:txBody>
+          <a:bodyPr wrap="none" rtlCol="0">
+            <a:spAutoFit/>
+          </a:bodyPr>
+          <a:lstStyle/>
+          <a:p>
+            <a:r>
+              <a:rPr lang="ko-KR" altLang="en-US" dirty="0" err="1"/>
+              <a:t>할일</a:t>
+            </a:r>
+            <a:r>
+              <a:rPr lang="en-US" altLang="ko-KR" dirty="0"/>
+              <a:t>2</a:t>
+            </a:r>
+            <a:r>
+              <a:rPr lang="ko-KR" altLang="en-US" dirty="0"/>
+              <a:t> </a:t>
+            </a:r>
+          </a:p>
+        </p:txBody>
+      </p:sp>
+      <p:pic>
+        <p:nvPicPr>
+          <p:cNvPr id="8" name="그림 7">
+            <a:extLst>
+              <a:ext uri="{FF2B5EF4-FFF2-40B4-BE49-F238E27FC236}">
+                <a16:creationId xmlns:a16="http://schemas.microsoft.com/office/drawing/2014/main" id="{04B4F7E6-5766-4C6B-B399-501FCC6A0A2C}"/>
+              </a:ext>
+            </a:extLst>
+          </p:cNvPr>
+          <p:cNvPicPr>
+            <a:picLocks noChangeAspect="1"/>
+          </p:cNvPicPr>
+          <p:nvPr/>
+        </p:nvPicPr>
+        <p:blipFill>
+          <a:blip r:embed="rId5"/>
+          <a:stretch>
+            <a:fillRect/>
+          </a:stretch>
+        </p:blipFill>
+        <p:spPr>
+          <a:xfrm>
+            <a:off x="6667103" y="3429000"/>
+            <a:ext cx="4498644" cy="2799688"/>
+          </a:xfrm>
+          <a:prstGeom prst="rect">
+            <a:avLst/>
+          </a:prstGeom>
+        </p:spPr>
+      </p:pic>
     </p:spTree>
     <p:extLst>
       <p:ext uri="{BB962C8B-B14F-4D97-AF65-F5344CB8AC3E}">
@@ -4403,6 +4603,46 @@
           </a:prstGeom>
         </p:spPr>
       </p:pic>
+      <p:sp>
+        <p:nvSpPr>
+          <p:cNvPr id="6" name="TextBox 5">
+            <a:extLst>
+              <a:ext uri="{FF2B5EF4-FFF2-40B4-BE49-F238E27FC236}">
+                <a16:creationId xmlns:a16="http://schemas.microsoft.com/office/drawing/2014/main" id="{0AE9FF4C-CEAE-4987-A96E-A2BA3D35EEF2}"/>
+              </a:ext>
+            </a:extLst>
+          </p:cNvPr>
+          <p:cNvSpPr txBox="1"/>
+          <p:nvPr/>
+        </p:nvSpPr>
+        <p:spPr>
+          <a:xfrm>
+            <a:off x="5043921" y="114521"/>
+            <a:ext cx="772969" cy="369332"/>
+          </a:xfrm>
+          <a:prstGeom prst="rect">
+            <a:avLst/>
+          </a:prstGeom>
+          <a:noFill/>
+        </p:spPr>
+        <p:txBody>
+          <a:bodyPr wrap="none" rtlCol="0">
+            <a:spAutoFit/>
+          </a:bodyPr>
+          <a:lstStyle/>
+          <a:p>
+            <a:r>
+              <a:rPr lang="ko-KR" altLang="en-US" dirty="0" err="1"/>
+              <a:t>할일</a:t>
+            </a:r>
+            <a:r>
+              <a:rPr lang="en-US" altLang="ko-KR" dirty="0"/>
+              <a:t>3</a:t>
+            </a:r>
+            <a:endParaRPr lang="ko-KR" altLang="en-US" dirty="0"/>
+          </a:p>
+        </p:txBody>
+      </p:sp>
     </p:spTree>
     <p:extLst>
       <p:ext uri="{BB962C8B-B14F-4D97-AF65-F5344CB8AC3E}">
